--- a/YogeshPortfolio_Presentation.pptx
+++ b/YogeshPortfolio_Presentation.pptx
@@ -1839,7 +1839,7 @@
 </file>
 
 <file path=ppt/slides/slide1.xml><?xml version="1.0" encoding="utf-8"?>
-<p:sld xmlns:p="http://schemas.openxmlformats.org/presentationml/2006/main">
+<p:sld xmlns:a="http://schemas.openxmlformats.org/drawingml/2006/main" xmlns:p="http://schemas.openxmlformats.org/presentationml/2006/main">
   <p:cSld>
     <p:bg>
       <p:bgPr>
@@ -2123,11 +2123,12 @@
       </p:sp>
     </p:spTree>
   </p:cSld>
+  <p:transition advTm="7500"/>
 </p:sld>
 </file>
 
 <file path=ppt/slides/slide10.xml><?xml version="1.0" encoding="utf-8"?>
-<p:sld xmlns:p="http://schemas.openxmlformats.org/presentationml/2006/main">
+<p:sld xmlns:a="http://schemas.openxmlformats.org/drawingml/2006/main" xmlns:p="http://schemas.openxmlformats.org/presentationml/2006/main">
   <p:cSld>
     <p:bg>
       <p:bgPr>
@@ -2736,11 +2737,12 @@
       </p:sp>
     </p:spTree>
   </p:cSld>
+  <p:transition advTm="7500"/>
 </p:sld>
 </file>
 
 <file path=ppt/slides/slide11.xml><?xml version="1.0" encoding="utf-8"?>
-<p:sld xmlns:p="http://schemas.openxmlformats.org/presentationml/2006/main">
+<p:sld xmlns:a="http://schemas.openxmlformats.org/drawingml/2006/main" xmlns:p="http://schemas.openxmlformats.org/presentationml/2006/main">
   <p:cSld>
     <p:bg>
       <p:bgPr>
@@ -3169,11 +3171,12 @@
       </p:sp>
     </p:spTree>
   </p:cSld>
+  <p:transition advTm="7500"/>
 </p:sld>
 </file>
 
 <file path=ppt/slides/slide12.xml><?xml version="1.0" encoding="utf-8"?>
-<p:sld xmlns:p="http://schemas.openxmlformats.org/presentationml/2006/main">
+<p:sld xmlns:a="http://schemas.openxmlformats.org/drawingml/2006/main" xmlns:p="http://schemas.openxmlformats.org/presentationml/2006/main">
   <p:cSld>
     <p:bg>
       <p:bgPr>
@@ -3805,11 +3808,12 @@
       </p:sp>
     </p:spTree>
   </p:cSld>
+  <p:transition advTm="7500"/>
 </p:sld>
 </file>
 
 <file path=ppt/slides/slide13.xml><?xml version="1.0" encoding="utf-8"?>
-<p:sld xmlns:p="http://schemas.openxmlformats.org/presentationml/2006/main">
+<p:sld xmlns:a="http://schemas.openxmlformats.org/drawingml/2006/main" xmlns:p="http://schemas.openxmlformats.org/presentationml/2006/main">
   <p:cSld>
     <p:bg>
       <p:bgPr>
@@ -4471,11 +4475,12 @@
       </p:sp>
     </p:spTree>
   </p:cSld>
+  <p:transition advTm="7500"/>
 </p:sld>
 </file>
 
 <file path=ppt/slides/slide14.xml><?xml version="1.0" encoding="utf-8"?>
-<p:sld xmlns:p="http://schemas.openxmlformats.org/presentationml/2006/main">
+<p:sld xmlns:a="http://schemas.openxmlformats.org/drawingml/2006/main" xmlns:p="http://schemas.openxmlformats.org/presentationml/2006/main">
   <p:cSld>
     <p:bg>
       <p:bgPr>
@@ -4966,11 +4971,12 @@
       </p:sp>
     </p:spTree>
   </p:cSld>
+  <p:transition advTm="7500"/>
 </p:sld>
 </file>
 
 <file path=ppt/slides/slide15.xml><?xml version="1.0" encoding="utf-8"?>
-<p:sld xmlns:p="http://schemas.openxmlformats.org/presentationml/2006/main">
+<p:sld xmlns:a="http://schemas.openxmlformats.org/drawingml/2006/main" xmlns:p="http://schemas.openxmlformats.org/presentationml/2006/main">
   <p:cSld>
     <p:bg>
       <p:bgPr>
@@ -5471,11 +5477,12 @@
       </p:sp>
     </p:spTree>
   </p:cSld>
+  <p:transition advTm="7500"/>
 </p:sld>
 </file>
 
 <file path=ppt/slides/slide16.xml><?xml version="1.0" encoding="utf-8"?>
-<p:sld xmlns:p="http://schemas.openxmlformats.org/presentationml/2006/main">
+<p:sld xmlns:a="http://schemas.openxmlformats.org/drawingml/2006/main" xmlns:p="http://schemas.openxmlformats.org/presentationml/2006/main">
   <p:cSld>
     <p:bg>
       <p:bgPr>
@@ -6121,11 +6128,12 @@
       </p:sp>
     </p:spTree>
   </p:cSld>
+  <p:transition advTm="7500"/>
 </p:sld>
 </file>
 
 <file path=ppt/slides/slide17.xml><?xml version="1.0" encoding="utf-8"?>
-<p:sld xmlns:p="http://schemas.openxmlformats.org/presentationml/2006/main">
+<p:sld xmlns:a="http://schemas.openxmlformats.org/drawingml/2006/main" xmlns:p="http://schemas.openxmlformats.org/presentationml/2006/main">
   <p:cSld>
     <p:bg>
       <p:bgPr>
@@ -6761,11 +6769,12 @@
       </p:sp>
     </p:spTree>
   </p:cSld>
+  <p:transition advTm="7500"/>
 </p:sld>
 </file>
 
 <file path=ppt/slides/slide18.xml><?xml version="1.0" encoding="utf-8"?>
-<p:sld xmlns:p="http://schemas.openxmlformats.org/presentationml/2006/main">
+<p:sld xmlns:a="http://schemas.openxmlformats.org/drawingml/2006/main" xmlns:p="http://schemas.openxmlformats.org/presentationml/2006/main">
   <p:cSld>
     <p:bg>
       <p:bgPr>
@@ -7128,11 +7137,12 @@
       </p:sp>
     </p:spTree>
   </p:cSld>
+  <p:transition advTm="7500"/>
 </p:sld>
 </file>
 
 <file path=ppt/slides/slide19.xml><?xml version="1.0" encoding="utf-8"?>
-<p:sld xmlns:p="http://schemas.openxmlformats.org/presentationml/2006/main">
+<p:sld xmlns:a="http://schemas.openxmlformats.org/drawingml/2006/main" xmlns:p="http://schemas.openxmlformats.org/presentationml/2006/main">
   <p:cSld>
     <p:bg>
       <p:bgPr>
@@ -7511,11 +7521,12 @@
       </p:sp>
     </p:spTree>
   </p:cSld>
+  <p:transition advTm="7500"/>
 </p:sld>
 </file>
 
 <file path=ppt/slides/slide2.xml><?xml version="1.0" encoding="utf-8"?>
-<p:sld xmlns:p="http://schemas.openxmlformats.org/presentationml/2006/main">
+<p:sld xmlns:a="http://schemas.openxmlformats.org/drawingml/2006/main" xmlns:p="http://schemas.openxmlformats.org/presentationml/2006/main">
   <p:cSld>
     <p:bg>
       <p:bgPr>
@@ -7859,11 +7870,12 @@
       </p:sp>
     </p:spTree>
   </p:cSld>
+  <p:transition advTm="7500"/>
 </p:sld>
 </file>
 
 <file path=ppt/slides/slide20.xml><?xml version="1.0" encoding="utf-8"?>
-<p:sld xmlns:p="http://schemas.openxmlformats.org/presentationml/2006/main">
+<p:sld xmlns:a="http://schemas.openxmlformats.org/drawingml/2006/main" xmlns:p="http://schemas.openxmlformats.org/presentationml/2006/main">
   <p:cSld>
     <p:bg>
       <p:bgPr>
@@ -8392,11 +8404,12 @@
       </p:sp>
     </p:spTree>
   </p:cSld>
+  <p:transition advTm="7500"/>
 </p:sld>
 </file>
 
 <file path=ppt/slides/slide3.xml><?xml version="1.0" encoding="utf-8"?>
-<p:sld xmlns:p="http://schemas.openxmlformats.org/presentationml/2006/main">
+<p:sld xmlns:a="http://schemas.openxmlformats.org/drawingml/2006/main" xmlns:p="http://schemas.openxmlformats.org/presentationml/2006/main">
   <p:cSld>
     <p:bg>
       <p:bgPr>
@@ -8762,11 +8775,12 @@
       </p:sp>
     </p:spTree>
   </p:cSld>
+  <p:transition advTm="7500"/>
 </p:sld>
 </file>
 
 <file path=ppt/slides/slide4.xml><?xml version="1.0" encoding="utf-8"?>
-<p:sld xmlns:p="http://schemas.openxmlformats.org/presentationml/2006/main">
+<p:sld xmlns:a="http://schemas.openxmlformats.org/drawingml/2006/main" xmlns:p="http://schemas.openxmlformats.org/presentationml/2006/main">
   <p:cSld>
     <p:bg>
       <p:bgPr>
@@ -9340,11 +9354,12 @@
       </p:sp>
     </p:spTree>
   </p:cSld>
+  <p:transition advTm="7500"/>
 </p:sld>
 </file>
 
 <file path=ppt/slides/slide5.xml><?xml version="1.0" encoding="utf-8"?>
-<p:sld xmlns:p="http://schemas.openxmlformats.org/presentationml/2006/main">
+<p:sld xmlns:a="http://schemas.openxmlformats.org/drawingml/2006/main" xmlns:p="http://schemas.openxmlformats.org/presentationml/2006/main">
   <p:cSld>
     <p:bg>
       <p:bgPr>
@@ -9728,11 +9743,12 @@
       </p:sp>
     </p:spTree>
   </p:cSld>
+  <p:transition advTm="7500"/>
 </p:sld>
 </file>
 
 <file path=ppt/slides/slide6.xml><?xml version="1.0" encoding="utf-8"?>
-<p:sld xmlns:p="http://schemas.openxmlformats.org/presentationml/2006/main">
+<p:sld xmlns:a="http://schemas.openxmlformats.org/drawingml/2006/main" xmlns:p="http://schemas.openxmlformats.org/presentationml/2006/main">
   <p:cSld>
     <p:bg>
       <p:bgPr>
@@ -10149,11 +10165,12 @@
       </p:sp>
     </p:spTree>
   </p:cSld>
+  <p:transition advTm="7500"/>
 </p:sld>
 </file>
 
 <file path=ppt/slides/slide7.xml><?xml version="1.0" encoding="utf-8"?>
-<p:sld xmlns:p="http://schemas.openxmlformats.org/presentationml/2006/main">
+<p:sld xmlns:a="http://schemas.openxmlformats.org/drawingml/2006/main" xmlns:p="http://schemas.openxmlformats.org/presentationml/2006/main">
   <p:cSld>
     <p:bg>
       <p:bgPr>
@@ -10557,11 +10574,12 @@
       </p:sp>
     </p:spTree>
   </p:cSld>
+  <p:transition advTm="7500"/>
 </p:sld>
 </file>
 
 <file path=ppt/slides/slide8.xml><?xml version="1.0" encoding="utf-8"?>
-<p:sld xmlns:p="http://schemas.openxmlformats.org/presentationml/2006/main">
+<p:sld xmlns:a="http://schemas.openxmlformats.org/drawingml/2006/main" xmlns:p="http://schemas.openxmlformats.org/presentationml/2006/main">
   <p:cSld>
     <p:bg>
       <p:bgPr>
@@ -11148,11 +11166,12 @@
       </p:sp>
     </p:spTree>
   </p:cSld>
+  <p:transition advTm="7500"/>
 </p:sld>
 </file>
 
 <file path=ppt/slides/slide9.xml><?xml version="1.0" encoding="utf-8"?>
-<p:sld xmlns:p="http://schemas.openxmlformats.org/presentationml/2006/main">
+<p:sld xmlns:a="http://schemas.openxmlformats.org/drawingml/2006/main" xmlns:p="http://schemas.openxmlformats.org/presentationml/2006/main">
   <p:cSld>
     <p:bg>
       <p:bgPr>
@@ -11886,6 +11905,7 @@
       </p:sp>
     </p:spTree>
   </p:cSld>
+  <p:transition advTm="7500"/>
 </p:sld>
 </file>
 
